--- a/useR.pptx
+++ b/useR.pptx
@@ -270,7 +270,7 @@
           <a:p>
             <a:fld id="{F7FECFD4-6A9B-D84B-AFA2-65FF069E1C3D}" type="datetimeFigureOut">
               <a:rPr lang="en-US" smtClean="0"/>
-              <a:t>6/3/26</a:t>
+              <a:t>6/8/26</a:t>
             </a:fld>
             <a:endParaRPr lang="en-US" dirty="0"/>
           </a:p>
@@ -468,7 +468,7 @@
           <a:p>
             <a:fld id="{F7FECFD4-6A9B-D84B-AFA2-65FF069E1C3D}" type="datetimeFigureOut">
               <a:rPr lang="en-US" smtClean="0"/>
-              <a:t>6/3/26</a:t>
+              <a:t>6/8/26</a:t>
             </a:fld>
             <a:endParaRPr lang="en-US" dirty="0"/>
           </a:p>
@@ -676,7 +676,7 @@
           <a:p>
             <a:fld id="{F7FECFD4-6A9B-D84B-AFA2-65FF069E1C3D}" type="datetimeFigureOut">
               <a:rPr lang="en-US" smtClean="0"/>
-              <a:t>6/3/26</a:t>
+              <a:t>6/8/26</a:t>
             </a:fld>
             <a:endParaRPr lang="en-US" dirty="0"/>
           </a:p>
@@ -874,7 +874,7 @@
           <a:p>
             <a:fld id="{F7FECFD4-6A9B-D84B-AFA2-65FF069E1C3D}" type="datetimeFigureOut">
               <a:rPr lang="en-US" smtClean="0"/>
-              <a:t>6/3/26</a:t>
+              <a:t>6/8/26</a:t>
             </a:fld>
             <a:endParaRPr lang="en-US" dirty="0"/>
           </a:p>
@@ -1149,7 +1149,7 @@
           <a:p>
             <a:fld id="{F7FECFD4-6A9B-D84B-AFA2-65FF069E1C3D}" type="datetimeFigureOut">
               <a:rPr lang="en-US" smtClean="0"/>
-              <a:t>6/3/26</a:t>
+              <a:t>6/8/26</a:t>
             </a:fld>
             <a:endParaRPr lang="en-US" dirty="0"/>
           </a:p>
@@ -1414,7 +1414,7 @@
           <a:p>
             <a:fld id="{F7FECFD4-6A9B-D84B-AFA2-65FF069E1C3D}" type="datetimeFigureOut">
               <a:rPr lang="en-US" smtClean="0"/>
-              <a:t>6/3/26</a:t>
+              <a:t>6/8/26</a:t>
             </a:fld>
             <a:endParaRPr lang="en-US" dirty="0"/>
           </a:p>
@@ -1826,7 +1826,7 @@
           <a:p>
             <a:fld id="{F7FECFD4-6A9B-D84B-AFA2-65FF069E1C3D}" type="datetimeFigureOut">
               <a:rPr lang="en-US" smtClean="0"/>
-              <a:t>6/3/26</a:t>
+              <a:t>6/8/26</a:t>
             </a:fld>
             <a:endParaRPr lang="en-US" dirty="0"/>
           </a:p>
@@ -1967,7 +1967,7 @@
           <a:p>
             <a:fld id="{F7FECFD4-6A9B-D84B-AFA2-65FF069E1C3D}" type="datetimeFigureOut">
               <a:rPr lang="en-US" smtClean="0"/>
-              <a:t>6/3/26</a:t>
+              <a:t>6/8/26</a:t>
             </a:fld>
             <a:endParaRPr lang="en-US" dirty="0"/>
           </a:p>
@@ -2080,7 +2080,7 @@
           <a:p>
             <a:fld id="{F7FECFD4-6A9B-D84B-AFA2-65FF069E1C3D}" type="datetimeFigureOut">
               <a:rPr lang="en-US" smtClean="0"/>
-              <a:t>6/3/26</a:t>
+              <a:t>6/8/26</a:t>
             </a:fld>
             <a:endParaRPr lang="en-US" dirty="0"/>
           </a:p>
@@ -2391,7 +2391,7 @@
           <a:p>
             <a:fld id="{F7FECFD4-6A9B-D84B-AFA2-65FF069E1C3D}" type="datetimeFigureOut">
               <a:rPr lang="en-US" smtClean="0"/>
-              <a:t>6/3/26</a:t>
+              <a:t>6/8/26</a:t>
             </a:fld>
             <a:endParaRPr lang="en-US" dirty="0"/>
           </a:p>
@@ -2679,7 +2679,7 @@
           <a:p>
             <a:fld id="{F7FECFD4-6A9B-D84B-AFA2-65FF069E1C3D}" type="datetimeFigureOut">
               <a:rPr lang="en-US" smtClean="0"/>
-              <a:t>6/3/26</a:t>
+              <a:t>6/8/26</a:t>
             </a:fld>
             <a:endParaRPr lang="en-US" dirty="0"/>
           </a:p>
@@ -2920,7 +2920,7 @@
           <a:p>
             <a:fld id="{F7FECFD4-6A9B-D84B-AFA2-65FF069E1C3D}" type="datetimeFigureOut">
               <a:rPr lang="en-US" smtClean="0"/>
-              <a:t>6/3/26</a:t>
+              <a:t>6/8/26</a:t>
             </a:fld>
             <a:endParaRPr lang="en-US" dirty="0"/>
           </a:p>
@@ -16003,7 +16003,7 @@
           <a:p>
             <a:r>
               <a:rPr lang="en-US" sz="1600" dirty="0"/>
-              <a:t>The same methods used by data scientists to model uncertainty, analyze networks, ,quantify risk, and optimize decisions can be applied to project planning</a:t>
+              <a:t>The same methods used by data scientists to model uncertainty, analyze networks, quantify risk, and optimize decisions can be applied to project planning</a:t>
             </a:r>
           </a:p>
           <a:p>
@@ -17883,10 +17883,16 @@
               <a:t>Defined as a table using the </a:t>
             </a:r>
             <a:r>
+              <a:rPr lang="en-US" sz="1600" dirty="0" err="1">
+                <a:latin typeface="Courier New" panose="02070309020205020404" pitchFamily="49" charset="0"/>
+              </a:rPr>
+              <a:t>tibble</a:t>
+            </a:r>
+            <a:r>
               <a:rPr lang="en-US" sz="1600" dirty="0">
                 <a:latin typeface="Courier New" panose="02070309020205020404" pitchFamily="49" charset="0"/>
               </a:rPr>
-              <a:t>tibble()</a:t>
+              <a:t>()</a:t>
             </a:r>
             <a:r>
               <a:rPr lang="en-US" sz="1600" dirty="0"/>
@@ -18263,7 +18269,7 @@
             </a:pPr>
             <a:r>
               <a:rPr lang="en-US" sz="1600" dirty="0"/>
-              <a:t>Arrows – dependency relationships</a:t>
+              <a:t>Arrows = dependency relationships</a:t>
             </a:r>
           </a:p>
           <a:p>
@@ -18530,7 +18536,7 @@
               <a:p>
                 <a:r>
                   <a:rPr lang="en-US" sz="1600" b="1" dirty="0"/>
-                  <a:t>A method for estimating tasks durations under uncertainty using three-point estimates</a:t>
+                  <a:t>A method for estimating task durations under uncertainty using three-point estimates</a:t>
                 </a:r>
               </a:p>
               <a:p>
@@ -18793,7 +18799,7 @@
               <a:blipFill>
                 <a:blip r:embed="rId3"/>
                 <a:stretch>
-                  <a:fillRect l="-455" t="-482" r="-909" b="-482"/>
+                  <a:fillRect l="-455" t="-482" b="-482"/>
                 </a:stretch>
               </a:blipFill>
             </p:spPr>
@@ -18872,7 +18878,7 @@
           <a:p>
             <a:r>
               <a:rPr lang="en-US" sz="1000" dirty="0"/>
-              <a:t>Task duration is modeled with a Beta distribution bounded by optimistic and pessimistic estimates. Unlike a normal distribution, it is not forced to be symmetric—allowing the most likely value to shape the distribution based and reflect expected skew in task outcomes. Created using </a:t>
+              <a:t>Task duration is modeled with a Beta distribution bounded by optimistic and pessimistic estimates. Unlike a normal distribution, it is not forced to be symmetric—allowing the most likely value to shape the distribution and reflect expected skew in task outcomes. Created using </a:t>
             </a:r>
             <a:r>
               <a:rPr lang="en-US" sz="1000" dirty="0">
@@ -20160,8 +20166,8 @@
         </p:nvSpPr>
         <p:spPr>
           <a:xfrm>
-            <a:off x="8094019" y="1525588"/>
-            <a:ext cx="3970981" cy="5262979"/>
+            <a:off x="8094019" y="1600019"/>
+            <a:ext cx="3970981" cy="5016758"/>
           </a:xfrm>
           <a:prstGeom prst="rect">
             <a:avLst/>
@@ -20186,7 +20192,7 @@
             </a:pPr>
             <a:r>
               <a:rPr lang="en-US" sz="1600" dirty="0"/>
-              <a:t>Estimates are expressed in weeks, rounded up to the nearest quarter and otherwise expressed as an integer</a:t>
+              <a:t>Estimates are expressed in weeks and rounded to practical planning values</a:t>
             </a:r>
           </a:p>
           <a:p>
@@ -23256,7 +23262,7 @@
         <p:spPr>
           <a:xfrm>
             <a:off x="6845294" y="6046203"/>
-            <a:ext cx="4635663" cy="553998"/>
+            <a:ext cx="4635663" cy="400110"/>
           </a:xfrm>
           <a:prstGeom prst="rect">
             <a:avLst/>
@@ -23271,7 +23277,7 @@
           <a:p>
             <a:r>
               <a:rPr lang="en-US" sz="1000" dirty="0"/>
-              <a:t>Project duration is approximated as a distribution; the shaded area represents the probability of completing within the 30—week target. Created using </a:t>
+              <a:t>Project duration is approximated as a distribution; the shaded area represents the probability of completing within the 30-week target. Created using </a:t>
             </a:r>
             <a:r>
               <a:rPr lang="en-US" sz="1000" dirty="0">

--- a/useR.pptx
+++ b/useR.pptx
@@ -270,7 +270,7 @@
           <a:p>
             <a:fld id="{F7FECFD4-6A9B-D84B-AFA2-65FF069E1C3D}" type="datetimeFigureOut">
               <a:rPr lang="en-US" smtClean="0"/>
-              <a:t>6/8/26</a:t>
+              <a:t>6/29/26</a:t>
             </a:fld>
             <a:endParaRPr lang="en-US" dirty="0"/>
           </a:p>
@@ -468,7 +468,7 @@
           <a:p>
             <a:fld id="{F7FECFD4-6A9B-D84B-AFA2-65FF069E1C3D}" type="datetimeFigureOut">
               <a:rPr lang="en-US" smtClean="0"/>
-              <a:t>6/8/26</a:t>
+              <a:t>6/29/26</a:t>
             </a:fld>
             <a:endParaRPr lang="en-US" dirty="0"/>
           </a:p>
@@ -676,7 +676,7 @@
           <a:p>
             <a:fld id="{F7FECFD4-6A9B-D84B-AFA2-65FF069E1C3D}" type="datetimeFigureOut">
               <a:rPr lang="en-US" smtClean="0"/>
-              <a:t>6/8/26</a:t>
+              <a:t>6/29/26</a:t>
             </a:fld>
             <a:endParaRPr lang="en-US" dirty="0"/>
           </a:p>
@@ -874,7 +874,7 @@
           <a:p>
             <a:fld id="{F7FECFD4-6A9B-D84B-AFA2-65FF069E1C3D}" type="datetimeFigureOut">
               <a:rPr lang="en-US" smtClean="0"/>
-              <a:t>6/8/26</a:t>
+              <a:t>6/29/26</a:t>
             </a:fld>
             <a:endParaRPr lang="en-US" dirty="0"/>
           </a:p>
@@ -1149,7 +1149,7 @@
           <a:p>
             <a:fld id="{F7FECFD4-6A9B-D84B-AFA2-65FF069E1C3D}" type="datetimeFigureOut">
               <a:rPr lang="en-US" smtClean="0"/>
-              <a:t>6/8/26</a:t>
+              <a:t>6/29/26</a:t>
             </a:fld>
             <a:endParaRPr lang="en-US" dirty="0"/>
           </a:p>
@@ -1414,7 +1414,7 @@
           <a:p>
             <a:fld id="{F7FECFD4-6A9B-D84B-AFA2-65FF069E1C3D}" type="datetimeFigureOut">
               <a:rPr lang="en-US" smtClean="0"/>
-              <a:t>6/8/26</a:t>
+              <a:t>6/29/26</a:t>
             </a:fld>
             <a:endParaRPr lang="en-US" dirty="0"/>
           </a:p>
@@ -1826,7 +1826,7 @@
           <a:p>
             <a:fld id="{F7FECFD4-6A9B-D84B-AFA2-65FF069E1C3D}" type="datetimeFigureOut">
               <a:rPr lang="en-US" smtClean="0"/>
-              <a:t>6/8/26</a:t>
+              <a:t>6/29/26</a:t>
             </a:fld>
             <a:endParaRPr lang="en-US" dirty="0"/>
           </a:p>
@@ -1967,7 +1967,7 @@
           <a:p>
             <a:fld id="{F7FECFD4-6A9B-D84B-AFA2-65FF069E1C3D}" type="datetimeFigureOut">
               <a:rPr lang="en-US" smtClean="0"/>
-              <a:t>6/8/26</a:t>
+              <a:t>6/29/26</a:t>
             </a:fld>
             <a:endParaRPr lang="en-US" dirty="0"/>
           </a:p>
@@ -2080,7 +2080,7 @@
           <a:p>
             <a:fld id="{F7FECFD4-6A9B-D84B-AFA2-65FF069E1C3D}" type="datetimeFigureOut">
               <a:rPr lang="en-US" smtClean="0"/>
-              <a:t>6/8/26</a:t>
+              <a:t>6/29/26</a:t>
             </a:fld>
             <a:endParaRPr lang="en-US" dirty="0"/>
           </a:p>
@@ -2391,7 +2391,7 @@
           <a:p>
             <a:fld id="{F7FECFD4-6A9B-D84B-AFA2-65FF069E1C3D}" type="datetimeFigureOut">
               <a:rPr lang="en-US" smtClean="0"/>
-              <a:t>6/8/26</a:t>
+              <a:t>6/29/26</a:t>
             </a:fld>
             <a:endParaRPr lang="en-US" dirty="0"/>
           </a:p>
@@ -2679,7 +2679,7 @@
           <a:p>
             <a:fld id="{F7FECFD4-6A9B-D84B-AFA2-65FF069E1C3D}" type="datetimeFigureOut">
               <a:rPr lang="en-US" smtClean="0"/>
-              <a:t>6/8/26</a:t>
+              <a:t>6/29/26</a:t>
             </a:fld>
             <a:endParaRPr lang="en-US" dirty="0"/>
           </a:p>
@@ -2920,7 +2920,7 @@
           <a:p>
             <a:fld id="{F7FECFD4-6A9B-D84B-AFA2-65FF069E1C3D}" type="datetimeFigureOut">
               <a:rPr lang="en-US" smtClean="0"/>
-              <a:t>6/8/26</a:t>
+              <a:t>6/29/26</a:t>
             </a:fld>
             <a:endParaRPr lang="en-US" dirty="0"/>
           </a:p>
@@ -15591,7 +15591,7 @@
             </a:r>
             <a:r>
               <a:rPr lang="en-US" sz="2000" i="1" dirty="0"/>
-              <a:t>Statistics Slam Dunk: Statistical analysis with R on real NBA data sets </a:t>
+              <a:t>Statistics Slam Dunk: Statistical analysis with R on real NBA data </a:t>
             </a:r>
             <a:r>
               <a:rPr lang="en-US" sz="2000" dirty="0"/>
@@ -18498,8 +18498,8 @@
           </a:fontRef>
         </p:style>
       </p:cxnSp>
-      <mc:AlternateContent xmlns:mc="http://schemas.openxmlformats.org/markup-compatibility/2006">
-        <mc:Choice xmlns:a14="http://schemas.microsoft.com/office/drawing/2010/main" Requires="a14">
+      <mc:AlternateContent xmlns:mc="http://schemas.openxmlformats.org/markup-compatibility/2006" xmlns:a14="http://schemas.microsoft.com/office/drawing/2010/main">
+        <mc:Choice Requires="a14">
           <p:sp>
             <p:nvSpPr>
               <p:cNvPr id="13" name="TextBox 12">
@@ -18773,7 +18773,7 @@
             </p:txBody>
           </p:sp>
         </mc:Choice>
-        <mc:Fallback>
+        <mc:Fallback xmlns="">
           <p:sp>
             <p:nvSpPr>
               <p:cNvPr id="13" name="TextBox 12">
